--- a/backend/output/robottikoiravalvonta_vr_seurannalla/powerpoint/template1.pptx
+++ b/backend/output/robottikoiravalvonta_vr_seurannalla/powerpoint/template1.pptx
@@ -3796,7 +3796,7 @@
                 <a:cs typeface="Bai Jamjuree Bold"/>
                 <a:sym typeface="Bai Jamjuree Bold"/>
               </a:rPr>
-              <a:t>Projekti</a:t>
+              <a:t>project</a:t>
             </a:r>
           </a:p>
         </p:txBody>
@@ -3878,7 +3878,7 @@
                 <a:cs typeface="Bai Jamjuree Bold"/>
                 <a:sym typeface="Bai Jamjuree Bold"/>
               </a:rPr>
-              <a:t>Robottikoiravalvonta VR:lla</a:t>
+              <a:t>roboai project student</a:t>
             </a:r>
           </a:p>
         </p:txBody>
@@ -3978,7 +3978,7 @@
                 <a:cs typeface="Bai Jamjuree"/>
                 <a:sym typeface="Bai Jamjuree"/>
               </a:rPr>
-              <a:t>Lue lisää</a:t>
+              <a:t>read more</a:t>
             </a:r>
           </a:p>
         </p:txBody>
@@ -4025,7 +4025,7 @@
                 <a:cs typeface="Bai Jamjuree"/>
                 <a:sym typeface="Bai Jamjuree"/>
               </a:rPr>
-              <a:t>Opiskelijat kehittivät järjestelmän, joka siirtää 360-kuvaa robottilta VR-laseihin. Tämä mahdollistaa turvallisen etävalvonnan vaarallisilla tuotantoalueilla.</a:t>
+              <a:t>Opiskelijaryhmä kehitti langattoman 360-asteen VR-valvontajärjestelmän vaarallisten tuotantoalueiden turvalliseen etäseurantaan.</a:t>
             </a:r>
           </a:p>
         </p:txBody>
@@ -4056,7 +4056,7 @@
       </p:pic>
       <p:pic>
         <p:nvPicPr>
-          <p:cNvPr id="31" name="Picture 30" descr="download_image1.png"/>
+          <p:cNvPr id="31" name="Picture 30" descr="download_image0.png"/>
           <p:cNvPicPr>
             <a:picLocks noChangeAspect="1"/>
           </p:cNvPicPr>
